--- a/03-build/pptx/C4_U5_alumno.pptx
+++ b/03-build/pptx/C4_U5_alumno.pptx
@@ -4204,7 +4204,6 @@
               <a:srgbClr val="D64550"/>
             </a:solidFill>
           </a:ln>
-          <a:effectLst/>
           <a:effectLst>
             <a:outerShdw blurRad="90000" dist="38000" dir="5400000" rotWithShape="0">
               <a:srgbClr val="20242E">
@@ -4392,7 +4391,6 @@
               <a:srgbClr val="E4E3DE"/>
             </a:solidFill>
           </a:ln>
-          <a:effectLst/>
           <a:effectLst>
             <a:outerShdw blurRad="90000" dist="38000" dir="5400000" rotWithShape="0">
               <a:srgbClr val="20242E">
@@ -5117,7 +5115,6 @@
               <a:srgbClr val="E4E3DE"/>
             </a:solidFill>
           </a:ln>
-          <a:effectLst/>
           <a:effectLst>
             <a:outerShdw blurRad="90000" dist="38000" dir="5400000" rotWithShape="0">
               <a:srgbClr val="20242E">
@@ -5261,7 +5258,6 @@
               <a:srgbClr val="E4E3DE"/>
             </a:solidFill>
           </a:ln>
-          <a:effectLst/>
           <a:effectLst>
             <a:outerShdw blurRad="90000" dist="38000" dir="5400000" rotWithShape="0">
               <a:srgbClr val="20242E">
@@ -5405,7 +5401,6 @@
               <a:srgbClr val="E4E3DE"/>
             </a:solidFill>
           </a:ln>
-          <a:effectLst/>
           <a:effectLst>
             <a:outerShdw blurRad="90000" dist="38000" dir="5400000" rotWithShape="0">
               <a:srgbClr val="20242E">
@@ -5549,7 +5544,6 @@
               <a:srgbClr val="E4E3DE"/>
             </a:solidFill>
           </a:ln>
-          <a:effectLst/>
           <a:effectLst>
             <a:outerShdw blurRad="90000" dist="38000" dir="5400000" rotWithShape="0">
               <a:srgbClr val="20242E">
@@ -5693,7 +5687,6 @@
               <a:srgbClr val="E4E3DE"/>
             </a:solidFill>
           </a:ln>
-          <a:effectLst/>
           <a:effectLst>
             <a:outerShdw blurRad="90000" dist="38000" dir="5400000" rotWithShape="0">
               <a:srgbClr val="20242E">
@@ -5837,7 +5830,6 @@
               <a:srgbClr val="E4E3DE"/>
             </a:solidFill>
           </a:ln>
-          <a:effectLst/>
           <a:effectLst>
             <a:outerShdw blurRad="90000" dist="38000" dir="5400000" rotWithShape="0">
               <a:srgbClr val="20242E">
@@ -5981,7 +5973,6 @@
               <a:srgbClr val="D64550"/>
             </a:solidFill>
           </a:ln>
-          <a:effectLst/>
           <a:effectLst>
             <a:outerShdw blurRad="90000" dist="38000" dir="5400000" rotWithShape="0">
               <a:srgbClr val="20242E">
@@ -6618,7 +6609,6 @@
               <a:srgbClr val="D64550"/>
             </a:solidFill>
           </a:ln>
-          <a:effectLst/>
           <a:effectLst>
             <a:outerShdw blurRad="90000" dist="38000" dir="5400000" rotWithShape="0">
               <a:srgbClr val="20242E">
@@ -6878,7 +6868,6 @@
               <a:srgbClr val="D64550"/>
             </a:solidFill>
           </a:ln>
-          <a:effectLst/>
           <a:effectLst>
             <a:outerShdw blurRad="90000" dist="38000" dir="5400000" rotWithShape="0">
               <a:srgbClr val="20242E">
@@ -7657,7 +7646,6 @@
               <a:srgbClr val="E4E3DE"/>
             </a:solidFill>
           </a:ln>
-          <a:effectLst/>
           <a:effectLst>
             <a:outerShdw blurRad="90000" dist="38000" dir="5400000" rotWithShape="0">
               <a:srgbClr val="20242E">
@@ -7811,7 +7799,6 @@
               <a:srgbClr val="E4E3DE"/>
             </a:solidFill>
           </a:ln>
-          <a:effectLst/>
           <a:effectLst>
             <a:outerShdw blurRad="90000" dist="38000" dir="5400000" rotWithShape="0">
               <a:srgbClr val="20242E">
@@ -7965,7 +7952,6 @@
               <a:srgbClr val="E4E3DE"/>
             </a:solidFill>
           </a:ln>
-          <a:effectLst/>
           <a:effectLst>
             <a:outerShdw blurRad="90000" dist="38000" dir="5400000" rotWithShape="0">
               <a:srgbClr val="20242E">
@@ -8119,7 +8105,6 @@
               <a:srgbClr val="E4E3DE"/>
             </a:solidFill>
           </a:ln>
-          <a:effectLst/>
           <a:effectLst>
             <a:outerShdw blurRad="90000" dist="38000" dir="5400000" rotWithShape="0">
               <a:srgbClr val="20242E">
@@ -8273,7 +8258,6 @@
               <a:srgbClr val="E4E3DE"/>
             </a:solidFill>
           </a:ln>
-          <a:effectLst/>
           <a:effectLst>
             <a:outerShdw blurRad="90000" dist="38000" dir="5400000" rotWithShape="0">
               <a:srgbClr val="20242E">
@@ -8427,7 +8411,6 @@
               <a:srgbClr val="E4E3DE"/>
             </a:solidFill>
           </a:ln>
-          <a:effectLst/>
           <a:effectLst>
             <a:outerShdw blurRad="90000" dist="38000" dir="5400000" rotWithShape="0">
               <a:srgbClr val="20242E">
@@ -8581,7 +8564,6 @@
               <a:srgbClr val="E4E3DE"/>
             </a:solidFill>
           </a:ln>
-          <a:effectLst/>
           <a:effectLst>
             <a:outerShdw blurRad="90000" dist="38000" dir="5400000" rotWithShape="0">
               <a:srgbClr val="20242E">
@@ -8735,7 +8717,6 @@
               <a:srgbClr val="E4E3DE"/>
             </a:solidFill>
           </a:ln>
-          <a:effectLst/>
           <a:effectLst>
             <a:outerShdw blurRad="90000" dist="38000" dir="5400000" rotWithShape="0">
               <a:srgbClr val="20242E">
@@ -8889,7 +8870,6 @@
               <a:srgbClr val="E4E3DE"/>
             </a:solidFill>
           </a:ln>
-          <a:effectLst/>
           <a:effectLst>
             <a:outerShdw blurRad="90000" dist="38000" dir="5400000" rotWithShape="0">
               <a:srgbClr val="20242E">
@@ -9043,7 +9023,6 @@
               <a:srgbClr val="E4E3DE"/>
             </a:solidFill>
           </a:ln>
-          <a:effectLst/>
           <a:effectLst>
             <a:outerShdw blurRad="90000" dist="38000" dir="5400000" rotWithShape="0">
               <a:srgbClr val="20242E">
@@ -9197,7 +9176,6 @@
               <a:srgbClr val="D64550"/>
             </a:solidFill>
           </a:ln>
-          <a:effectLst/>
           <a:effectLst>
             <a:outerShdw blurRad="90000" dist="38000" dir="5400000" rotWithShape="0">
               <a:srgbClr val="20242E">
@@ -9351,7 +9329,6 @@
               <a:srgbClr val="D64550"/>
             </a:solidFill>
           </a:ln>
-          <a:effectLst/>
           <a:effectLst>
             <a:outerShdw blurRad="90000" dist="38000" dir="5400000" rotWithShape="0">
               <a:srgbClr val="20242E">
@@ -9988,7 +9965,6 @@
               <a:srgbClr val="E4E3DE"/>
             </a:solidFill>
           </a:ln>
-          <a:effectLst/>
           <a:effectLst>
             <a:outerShdw blurRad="90000" dist="38000" dir="5400000" rotWithShape="0">
               <a:srgbClr val="20242E">
@@ -10242,7 +10218,6 @@
               <a:srgbClr val="D64550"/>
             </a:solidFill>
           </a:ln>
-          <a:effectLst/>
           <a:effectLst>
             <a:outerShdw blurRad="90000" dist="38000" dir="5400000" rotWithShape="0">
               <a:srgbClr val="20242E">
@@ -11110,7 +11085,6 @@
               <a:srgbClr val="E4E3DE"/>
             </a:solidFill>
           </a:ln>
-          <a:effectLst/>
           <a:effectLst>
             <a:outerShdw blurRad="90000" dist="38000" dir="5400000" rotWithShape="0">
               <a:srgbClr val="20242E">
@@ -11279,7 +11253,6 @@
               <a:srgbClr val="E4E3DE"/>
             </a:solidFill>
           </a:ln>
-          <a:effectLst/>
           <a:effectLst>
             <a:outerShdw blurRad="90000" dist="38000" dir="5400000" rotWithShape="0">
               <a:srgbClr val="20242E">
@@ -11448,7 +11421,6 @@
               <a:srgbClr val="E4E3DE"/>
             </a:solidFill>
           </a:ln>
-          <a:effectLst/>
           <a:effectLst>
             <a:outerShdw blurRad="90000" dist="38000" dir="5400000" rotWithShape="0">
               <a:srgbClr val="20242E">
@@ -11617,7 +11589,6 @@
               <a:srgbClr val="E4E3DE"/>
             </a:solidFill>
           </a:ln>
-          <a:effectLst/>
           <a:effectLst>
             <a:outerShdw blurRad="90000" dist="38000" dir="5400000" rotWithShape="0">
               <a:srgbClr val="20242E">
@@ -11786,7 +11757,6 @@
               <a:srgbClr val="E4E3DE"/>
             </a:solidFill>
           </a:ln>
-          <a:effectLst/>
           <a:effectLst>
             <a:outerShdw blurRad="90000" dist="38000" dir="5400000" rotWithShape="0">
               <a:srgbClr val="20242E">
@@ -11955,7 +11925,6 @@
               <a:srgbClr val="E4E3DE"/>
             </a:solidFill>
           </a:ln>
-          <a:effectLst/>
           <a:effectLst>
             <a:outerShdw blurRad="90000" dist="38000" dir="5400000" rotWithShape="0">
               <a:srgbClr val="20242E">
@@ -12124,7 +12093,6 @@
               <a:srgbClr val="E4E3DE"/>
             </a:solidFill>
           </a:ln>
-          <a:effectLst/>
           <a:effectLst>
             <a:outerShdw blurRad="90000" dist="38000" dir="5400000" rotWithShape="0">
               <a:srgbClr val="20242E">
@@ -12293,7 +12261,6 @@
               <a:srgbClr val="E4E3DE"/>
             </a:solidFill>
           </a:ln>
-          <a:effectLst/>
           <a:effectLst>
             <a:outerShdw blurRad="90000" dist="38000" dir="5400000" rotWithShape="0">
               <a:srgbClr val="20242E">
@@ -12462,7 +12429,6 @@
               <a:srgbClr val="E4E3DE"/>
             </a:solidFill>
           </a:ln>
-          <a:effectLst/>
           <a:effectLst>
             <a:outerShdw blurRad="90000" dist="38000" dir="5400000" rotWithShape="0">
               <a:srgbClr val="20242E">
@@ -13211,7 +13177,6 @@
               <a:srgbClr val="E4E3DE"/>
             </a:solidFill>
           </a:ln>
-          <a:effectLst/>
           <a:effectLst>
             <a:outerShdw blurRad="90000" dist="38000" dir="5400000" rotWithShape="0">
               <a:srgbClr val="20242E">
@@ -14066,7 +14031,6 @@
               <a:srgbClr val="D64550"/>
             </a:solidFill>
           </a:ln>
-          <a:effectLst/>
           <a:effectLst>
             <a:outerShdw blurRad="90000" dist="38000" dir="5400000" rotWithShape="0">
               <a:srgbClr val="20242E">
@@ -14815,7 +14779,6 @@
               <a:srgbClr val="E4E3DE"/>
             </a:solidFill>
           </a:ln>
-          <a:effectLst/>
           <a:effectLst>
             <a:outerShdw blurRad="90000" dist="38000" dir="5400000" rotWithShape="0">
               <a:srgbClr val="20242E">
@@ -15026,7 +14989,6 @@
               <a:srgbClr val="E4E3DE"/>
             </a:solidFill>
           </a:ln>
-          <a:effectLst/>
           <a:effectLst>
             <a:outerShdw blurRad="90000" dist="38000" dir="5400000" rotWithShape="0">
               <a:srgbClr val="20242E">
@@ -15237,7 +15199,6 @@
               <a:srgbClr val="D64550"/>
             </a:solidFill>
           </a:ln>
-          <a:effectLst/>
           <a:effectLst>
             <a:outerShdw blurRad="90000" dist="38000" dir="5400000" rotWithShape="0">
               <a:srgbClr val="20242E">
@@ -16135,7 +16096,6 @@
               <a:srgbClr val="E4E3DE"/>
             </a:solidFill>
           </a:ln>
-          <a:effectLst/>
           <a:effectLst>
             <a:outerShdw blurRad="90000" dist="38000" dir="5400000" rotWithShape="0">
               <a:srgbClr val="20242E">
@@ -16505,7 +16465,6 @@
               <a:srgbClr val="E4E3DE"/>
             </a:solidFill>
           </a:ln>
-          <a:effectLst/>
           <a:effectLst>
             <a:outerShdw blurRad="90000" dist="38000" dir="5400000" rotWithShape="0">
               <a:srgbClr val="20242E">
@@ -16875,7 +16834,6 @@
               <a:srgbClr val="E4E3DE"/>
             </a:solidFill>
           </a:ln>
-          <a:effectLst/>
           <a:effectLst>
             <a:outerShdw blurRad="90000" dist="38000" dir="5400000" rotWithShape="0">
               <a:srgbClr val="20242E">
@@ -17773,7 +17731,6 @@
               <a:srgbClr val="D64550"/>
             </a:solidFill>
           </a:ln>
-          <a:effectLst/>
           <a:effectLst>
             <a:outerShdw blurRad="90000" dist="38000" dir="5400000" rotWithShape="0">
               <a:srgbClr val="20242E">
@@ -18143,7 +18100,6 @@
               <a:srgbClr val="E4E3DE"/>
             </a:solidFill>
           </a:ln>
-          <a:effectLst/>
           <a:effectLst>
             <a:outerShdw blurRad="90000" dist="38000" dir="5400000" rotWithShape="0">
               <a:srgbClr val="20242E">
@@ -19595,7 +19551,6 @@
               <a:srgbClr val="E4E3DE"/>
             </a:solidFill>
           </a:ln>
-          <a:effectLst/>
           <a:effectLst>
             <a:outerShdw blurRad="90000" dist="38000" dir="5400000" rotWithShape="0">
               <a:srgbClr val="20242E">
@@ -19884,7 +19839,6 @@
               <a:srgbClr val="E4E3DE"/>
             </a:solidFill>
           </a:ln>
-          <a:effectLst/>
           <a:effectLst>
             <a:outerShdw blurRad="90000" dist="38000" dir="5400000" rotWithShape="0">
               <a:srgbClr val="20242E">
@@ -20227,7 +20181,6 @@
               <a:srgbClr val="D64550"/>
             </a:solidFill>
           </a:ln>
-          <a:effectLst/>
           <a:effectLst>
             <a:outerShdw blurRad="90000" dist="38000" dir="5400000" rotWithShape="0">
               <a:srgbClr val="20242E">
@@ -21340,7 +21293,6 @@
               <a:srgbClr val="E4E3DE"/>
             </a:solidFill>
           </a:ln>
-          <a:effectLst/>
           <a:effectLst>
             <a:outerShdw blurRad="90000" dist="38000" dir="5400000" rotWithShape="0">
               <a:srgbClr val="20242E">
@@ -21484,7 +21436,6 @@
               <a:srgbClr val="E4E3DE"/>
             </a:solidFill>
           </a:ln>
-          <a:effectLst/>
           <a:effectLst>
             <a:outerShdw blurRad="90000" dist="38000" dir="5400000" rotWithShape="0">
               <a:srgbClr val="20242E">
@@ -21628,7 +21579,6 @@
               <a:srgbClr val="E4E3DE"/>
             </a:solidFill>
           </a:ln>
-          <a:effectLst/>
           <a:effectLst>
             <a:outerShdw blurRad="90000" dist="38000" dir="5400000" rotWithShape="0">
               <a:srgbClr val="20242E">
@@ -22453,7 +22403,6 @@
               <a:srgbClr val="E4E3DE"/>
             </a:solidFill>
           </a:ln>
-          <a:effectLst/>
           <a:effectLst>
             <a:outerShdw blurRad="90000" dist="38000" dir="5400000" rotWithShape="0">
               <a:srgbClr val="20242E">
